--- a/Docs/GDD_D1P_OpenStance.pptx
+++ b/Docs/GDD_D1P_OpenStance.pptx
@@ -4640,7 +4640,7 @@
                 <a:ea typeface="Arial" pitchFamily="34" charset="-122"/>
                 <a:cs typeface="Arial" pitchFamily="34" charset="-120"/>
               </a:rPr>
-              <a:t>Future, After 1.0</a:t>
+              <a:t>Future, After v1.0</a:t>
             </a:r>
             <a:endParaRPr lang="en-US" sz="1500" dirty="0"/>
           </a:p>
@@ -4679,7 +4679,7 @@
                 <a:ea typeface="Calibri" pitchFamily="34" charset="-122"/>
                 <a:cs typeface="Calibri" pitchFamily="34" charset="-120"/>
               </a:rPr>
-              <a:t>Online Casual and Ranked · Team Championship · Challenges · Para Taekwondo · Replays and Broadcast Tools</a:t>
+              <a:t>Online Casual and Ranked · Team Championship · Challenges · Para Taekwondo · Replays and Broadcast Tools · Referee Mode</a:t>
             </a:r>
             <a:endParaRPr lang="en-US" sz="1400" dirty="0"/>
           </a:p>
@@ -5864,7 +5864,7 @@
                 <a:ea typeface="Calibri" pitchFamily="34" charset="-122"/>
                 <a:cs typeface="Calibri" pitchFamily="34" charset="-120"/>
               </a:rPr>
-              <a:t>Plan  →  Train  →  Grade or Compete  →  Review  →  Level Up</a:t>
+              <a:t>Plan  →  Train  →  Prepare  →  Grade or Compete  →  Review  →  Level Up</a:t>
             </a:r>
             <a:endParaRPr lang="en-US" sz="1400" dirty="0"/>
           </a:p>
@@ -10943,7 +10943,7 @@
                 <a:ea typeface="Calibri" pitchFamily="34" charset="-122"/>
                 <a:cs typeface="Calibri" pitchFamily="34" charset="-120"/>
               </a:rPr>
-              <a:t>1.0 Content  </a:t>
+              <a:t>v1.0 Content  </a:t>
             </a:r>
             <a:r>
               <a:rPr lang="en-US" sz="1300" dirty="0">
@@ -10954,7 +10954,7 @@
                 <a:ea typeface="Calibri" pitchFamily="34" charset="-122"/>
                 <a:cs typeface="Calibri" pitchFamily="34" charset="-120"/>
               </a:rPr>
-              <a:t>1–2 Fighters · Arena and Training Dojang · 8–12 Captured Techniques · Sparring, Training and Local Tournament · AI Opponent · A Career Season. December 2026 Break Is a Buffer for Mocap Production.</a:t>
+              <a:t>1–2 Premade Fighters and Five Body Types · Arena, Training Dojang and a Venue per Career Tier · 8–12 Captured Techniques · Sparring, Training and Local Tournament · AI Opponent · Career Seasons. December 2026 Break Is a Buffer for Mocap Production.</a:t>
             </a:r>
             <a:endParaRPr lang="en-US" sz="1300" dirty="0"/>
           </a:p>

--- a/Docs/GDD_D1P_OpenStance.pptx
+++ b/Docs/GDD_D1P_OpenStance.pptx
@@ -9903,7 +9903,7 @@
                 <a:ea typeface="Arial" pitchFamily="34" charset="-122"/>
                 <a:cs typeface="Arial" pitchFamily="34" charset="-120"/>
               </a:rPr>
-              <a:t>Proposal</a:t>
+              <a:t>GDD Drafts</a:t>
             </a:r>
             <a:endParaRPr lang="en-US" sz="1600" dirty="0"/>
           </a:p>
@@ -9942,7 +9942,7 @@
                 <a:ea typeface="Calibri" pitchFamily="34" charset="-122"/>
                 <a:cs typeface="Calibri" pitchFamily="34" charset="-120"/>
               </a:rPr>
-              <a:t>Now · Sep–Oct</a:t>
+              <a:t>Now · Sep–Nov</a:t>
             </a:r>
             <a:endParaRPr lang="en-US" sz="1200" dirty="0"/>
           </a:p>
@@ -9981,7 +9981,7 @@
                 <a:ea typeface="Calibri" pitchFamily="34" charset="-122"/>
                 <a:cs typeface="Calibri" pitchFamily="34" charset="-120"/>
               </a:rPr>
-              <a:t>Approved Proposal</a:t>
+              <a:t>Draft 1 (21 Sep) to Final Draft (30 Nov)</a:t>
             </a:r>
             <a:endParaRPr lang="en-US" sz="1200" dirty="0"/>
           </a:p>
@@ -10091,7 +10091,7 @@
                 <a:ea typeface="Calibri" pitchFamily="34" charset="-122"/>
                 <a:cs typeface="Calibri" pitchFamily="34" charset="-120"/>
               </a:rPr>
-              <a:t>Fall 2026</a:t>
+              <a:t>Due 9 Nov 2026</a:t>
             </a:r>
             <a:endParaRPr lang="en-US" sz="1200" dirty="0"/>
           </a:p>
@@ -10240,7 +10240,7 @@
                 <a:ea typeface="Calibri" pitchFamily="34" charset="-122"/>
                 <a:cs typeface="Calibri" pitchFamily="34" charset="-120"/>
               </a:rPr>
-              <a:t>Dec 2026</a:t>
+              <a:t>Due 7 Dec 2026</a:t>
             </a:r>
             <a:endParaRPr lang="en-US" sz="1200" dirty="0"/>
           </a:p>
@@ -11539,7 +11539,7 @@
                 <a:ea typeface="Calibri" pitchFamily="34" charset="-122"/>
                 <a:cs typeface="Calibri" pitchFamily="34" charset="-120"/>
               </a:rPr>
-              <a:t>BCIT Proposal: Requirements, Research, Architecture, Feasibility (Due Oct 2026)</a:t>
+              <a:t>GDD Draft 1: Due 21 Sep, Presented 28 Sep</a:t>
             </a:r>
             <a:endParaRPr lang="en-US" sz="1500" dirty="0"/>
           </a:p>
@@ -11560,7 +11560,7 @@
                 <a:ea typeface="Calibri" pitchFamily="34" charset="-122"/>
                 <a:cs typeface="Calibri" pitchFamily="34" charset="-120"/>
               </a:rPr>
-              <a:t>This Design Document</a:t>
+              <a:t>Game Systems Design (Week 3 of COMP 8800)</a:t>
             </a:r>
             <a:endParaRPr lang="en-US" sz="1500" dirty="0"/>
           </a:p>
